--- a/docs/VayuCoupler_SIH_AtomX_Idea_Submission.pptx
+++ b/docs/VayuCoupler_SIH_AtomX_Idea_Submission.pptx
@@ -3132,7 +3132,7 @@
               </a:defRPr>
             </a:pPr>
             <a:r>
-              <a:t>SMART INDIA HACKATHON 2025</a:t>
+              <a:t>SMART INDIA HACKATHON 2026</a:t>
             </a:r>
           </a:p>
         </p:txBody>
@@ -3179,7 +3179,7 @@
       </p:sp>
       <p:pic>
         <p:nvPicPr>
-          <p:cNvPr id="4" name="Picture 3" descr="sih_header_logo.png"/>
+          <p:cNvPr id="4" name="Picture 3" descr="sih_header_logo_2026.png"/>
           <p:cNvPicPr>
             <a:picLocks noChangeAspect="1"/>
           </p:cNvPicPr>
@@ -3193,8 +3193,8 @@
         </p:blipFill>
         <p:spPr>
           <a:xfrm>
-            <a:off x="9875520" y="274320"/>
-            <a:ext cx="1920240" cy="704088"/>
+            <a:off x="9875520" y="228600"/>
+            <a:ext cx="1920240" cy="660082"/>
           </a:xfrm>
           <a:prstGeom prst="rect">
             <a:avLst/>
@@ -3203,7 +3203,7 @@
       </p:pic>
       <p:pic>
         <p:nvPicPr>
-          <p:cNvPr id="5" name="Picture 4" descr="sih_bulb_hero.png"/>
+          <p:cNvPr id="5" name="Picture 4" descr="sih_bulb_official.png"/>
           <p:cNvPicPr>
             <a:picLocks noChangeAspect="1"/>
           </p:cNvPicPr>
@@ -3217,8 +3217,8 @@
         </p:blipFill>
         <p:spPr>
           <a:xfrm>
-            <a:off x="7132320" y="2011680"/>
-            <a:ext cx="4114800" cy="4114800"/>
+            <a:off x="7315200" y="1920240"/>
+            <a:ext cx="4023360" cy="4023360"/>
           </a:xfrm>
           <a:prstGeom prst="rect">
             <a:avLst/>
@@ -3518,7 +3518,7 @@
       </p:sp>
       <p:pic>
         <p:nvPicPr>
-          <p:cNvPr id="4" name="Picture 3" descr="sih_header_logo.png"/>
+          <p:cNvPr id="4" name="Picture 3" descr="sih_header_logo_2026.png"/>
           <p:cNvPicPr>
             <a:picLocks noChangeAspect="1"/>
           </p:cNvPicPr>
@@ -3532,8 +3532,8 @@
         </p:blipFill>
         <p:spPr>
           <a:xfrm>
-            <a:off x="9875520" y="201168"/>
-            <a:ext cx="1920240" cy="704088"/>
+            <a:off x="9875520" y="182880"/>
+            <a:ext cx="1920240" cy="660082"/>
           </a:xfrm>
           <a:prstGeom prst="rect">
             <a:avLst/>
@@ -3621,7 +3621,7 @@
         <p:spPr>
           <a:xfrm>
             <a:off x="457200" y="1051560"/>
-            <a:ext cx="5577840" cy="4206240"/>
+            <a:ext cx="5486400" cy="4206240"/>
           </a:xfrm>
           <a:prstGeom prst="rect">
             <a:avLst/>
@@ -3760,7 +3760,7 @@
       </p:sp>
       <p:pic>
         <p:nvPicPr>
-          <p:cNvPr id="8" name="Picture 7" descr="phone_mockup.png"/>
+          <p:cNvPr id="8" name="Picture 7" descr="framed_real_mobile.png"/>
           <p:cNvPicPr>
             <a:picLocks noChangeAspect="1"/>
           </p:cNvPicPr>
@@ -3774,8 +3774,8 @@
         </p:blipFill>
         <p:spPr>
           <a:xfrm>
-            <a:off x="6217920" y="1097280"/>
-            <a:ext cx="2351314" cy="4114800"/>
+            <a:off x="6172200" y="1051560"/>
+            <a:ext cx="2331720" cy="4451465"/>
           </a:xfrm>
           <a:prstGeom prst="rect">
             <a:avLst/>
@@ -4390,7 +4390,7 @@
       </p:sp>
       <p:pic>
         <p:nvPicPr>
-          <p:cNvPr id="4" name="Picture 3" descr="sih_header_logo.png"/>
+          <p:cNvPr id="4" name="Picture 3" descr="sih_header_logo_2026.png"/>
           <p:cNvPicPr>
             <a:picLocks noChangeAspect="1"/>
           </p:cNvPicPr>
@@ -4404,8 +4404,8 @@
         </p:blipFill>
         <p:spPr>
           <a:xfrm>
-            <a:off x="9875520" y="201168"/>
-            <a:ext cx="1920240" cy="704088"/>
+            <a:off x="9875520" y="182880"/>
+            <a:ext cx="1920240" cy="660082"/>
           </a:xfrm>
           <a:prstGeom prst="rect">
             <a:avLst/>
@@ -4754,7 +4754,7 @@
       </p:sp>
       <p:pic>
         <p:nvPicPr>
-          <p:cNvPr id="11" name="Picture 10" descr="architecture_flow.png"/>
+          <p:cNvPr id="11" name="Picture 10" descr="technical_center_composition.png"/>
           <p:cNvPicPr>
             <a:picLocks noChangeAspect="1"/>
           </p:cNvPicPr>
@@ -4768,8 +4768,8 @@
         </p:blipFill>
         <p:spPr>
           <a:xfrm>
-            <a:off x="3108960" y="1097280"/>
-            <a:ext cx="5852160" cy="4535424"/>
+            <a:off x="3063240" y="1078992"/>
+            <a:ext cx="5943600" cy="4754880"/>
           </a:xfrm>
           <a:prstGeom prst="rect">
             <a:avLst/>
@@ -5167,7 +5167,7 @@
       </p:sp>
       <p:pic>
         <p:nvPicPr>
-          <p:cNvPr id="4" name="Picture 3" descr="sih_header_logo.png"/>
+          <p:cNvPr id="4" name="Picture 3" descr="sih_header_logo_2026.png"/>
           <p:cNvPicPr>
             <a:picLocks noChangeAspect="1"/>
           </p:cNvPicPr>
@@ -5181,8 +5181,8 @@
         </p:blipFill>
         <p:spPr>
           <a:xfrm>
-            <a:off x="9875520" y="201168"/>
-            <a:ext cx="1920240" cy="704088"/>
+            <a:off x="9875520" y="182880"/>
+            <a:ext cx="1920240" cy="660082"/>
           </a:xfrm>
           <a:prstGeom prst="rect">
             <a:avLst/>
@@ -5757,7 +5757,7 @@
       </p:sp>
       <p:pic>
         <p:nvPicPr>
-          <p:cNvPr id="4" name="Picture 3" descr="sih_header_logo.png"/>
+          <p:cNvPr id="4" name="Picture 3" descr="sih_header_logo_2026.png"/>
           <p:cNvPicPr>
             <a:picLocks noChangeAspect="1"/>
           </p:cNvPicPr>
@@ -5771,8 +5771,8 @@
         </p:blipFill>
         <p:spPr>
           <a:xfrm>
-            <a:off x="9875520" y="201168"/>
-            <a:ext cx="1920240" cy="704088"/>
+            <a:off x="9875520" y="182880"/>
+            <a:ext cx="1920240" cy="660082"/>
           </a:xfrm>
           <a:prstGeom prst="rect">
             <a:avLst/>
@@ -5860,7 +5860,7 @@
         <p:spPr>
           <a:xfrm>
             <a:off x="548640" y="1051560"/>
-            <a:ext cx="5852160" cy="5120640"/>
+            <a:ext cx="5669280" cy="5120640"/>
           </a:xfrm>
           <a:prstGeom prst="rect">
             <a:avLst/>
@@ -5999,8 +5999,8 @@
         </p:nvSpPr>
         <p:spPr>
           <a:xfrm>
-            <a:off x="6675120" y="1097280"/>
-            <a:ext cx="5029200" cy="502920"/>
+            <a:off x="6492240" y="1097280"/>
+            <a:ext cx="5212080" cy="502920"/>
           </a:xfrm>
           <a:prstGeom prst="roundRect">
             <a:avLst/>
@@ -6048,7 +6048,7 @@
       </p:sp>
       <p:pic>
         <p:nvPicPr>
-          <p:cNvPr id="9" name="Picture 8" descr="command_center_preview.png"/>
+          <p:cNvPr id="9" name="Picture 8" descr="real_app_desktop.png"/>
           <p:cNvPicPr>
             <a:picLocks noChangeAspect="1"/>
           </p:cNvPicPr>
@@ -6062,8 +6062,8 @@
         </p:blipFill>
         <p:spPr>
           <a:xfrm>
-            <a:off x="6675120" y="1737360"/>
-            <a:ext cx="5029200" cy="3520440"/>
+            <a:off x="6492240" y="1737360"/>
+            <a:ext cx="5212080" cy="3164477"/>
           </a:xfrm>
           <a:prstGeom prst="rect">
             <a:avLst/>
@@ -6189,7 +6189,7 @@
       </p:sp>
       <p:pic>
         <p:nvPicPr>
-          <p:cNvPr id="4" name="Picture 3" descr="sih_header_logo.png"/>
+          <p:cNvPr id="4" name="Picture 3" descr="sih_header_logo_2026.png"/>
           <p:cNvPicPr>
             <a:picLocks noChangeAspect="1"/>
           </p:cNvPicPr>
@@ -6203,8 +6203,8 @@
         </p:blipFill>
         <p:spPr>
           <a:xfrm>
-            <a:off x="9875520" y="201168"/>
-            <a:ext cx="1920240" cy="704088"/>
+            <a:off x="9875520" y="182880"/>
+            <a:ext cx="1920240" cy="660082"/>
           </a:xfrm>
           <a:prstGeom prst="rect">
             <a:avLst/>

--- a/docs/VayuCoupler_SIH_AtomX_Idea_Submission.pptx
+++ b/docs/VayuCoupler_SIH_AtomX_Idea_Submission.pptx
@@ -3830,11 +3830,11 @@
               </a:defRPr>
             </a:pPr>
             <a:r>
-              <a:t>Real Time Air Quality Exploration</a:t>
+              <a:t>Atmospheric Ambient Halo AQI</a:t>
             </a:r>
             <a:br/>
             <a:r>
-              <a:t>using Interactive Maps.</a:t>
+              <a:t>Cockpit with 3-Day Forecast Strip</a:t>
             </a:r>
           </a:p>
         </p:txBody>
@@ -3887,11 +3887,11 @@
               </a:defRPr>
             </a:pPr>
             <a:r>
-              <a:t>Conversational Query System</a:t>
+              <a:t>Google Weather-Style Live</a:t>
             </a:r>
             <a:br/>
             <a:r>
-              <a:t>using LLM + RAG Pipelines</a:t>
+              <a:t>Microclimate Telemetry Engine</a:t>
             </a:r>
           </a:p>
         </p:txBody>
@@ -3944,11 +3944,11 @@
               </a:defRPr>
             </a:pPr>
             <a:r>
-              <a:t>Automatic Ingestion of CPCB</a:t>
+              <a:t>Interactive Spatial GIS Grid with</a:t>
             </a:r>
             <a:br/>
             <a:r>
-              <a:t>Sensors + NASA FIRMS Satellites</a:t>
+              <a:t>40+ CPCB CAAQMS Stations</a:t>
             </a:r>
           </a:p>
         </p:txBody>
@@ -4001,11 +4001,11 @@
               </a:defRPr>
             </a:pPr>
             <a:r>
-              <a:t>Atmospheric Boundary Layer</a:t>
+              <a:t>6-Pollutant Real-Time Telemetry:</a:t>
             </a:r>
             <a:br/>
             <a:r>
-              <a:t>(PBLH) &amp; Inversion Coupling</a:t>
+              <a:t>PM2.5, PM10, NO2, SO2, CO, O3</a:t>
             </a:r>
           </a:p>
         </p:txBody>
@@ -4058,11 +4058,11 @@
               </a:defRPr>
             </a:pPr>
             <a:r>
-              <a:t>Geospatial Tracking of Transboundary</a:t>
+              <a:t>Safe Commute Clean Route Navigator</a:t>
             </a:r>
             <a:br/>
             <a:r>
-              <a:t>Stubble Fire Plumes &amp; Trajectories</a:t>
+              <a:t>Cutting 35%–48% Inhaled PM2.5</a:t>
             </a:r>
           </a:p>
         </p:txBody>
@@ -4115,11 +4115,11 @@
               </a:defRPr>
             </a:pPr>
             <a:r>
-              <a:t>Delivers direct scientific insights for</a:t>
+              <a:t>Conversational VayuAI Assistant</a:t>
             </a:r>
             <a:br/>
             <a:r>
-              <a:t>public health, municipal bodies &amp; policy.</a:t>
+              <a:t>for Instant Plain-Language Advice</a:t>
             </a:r>
           </a:p>
         </p:txBody>
@@ -4834,15 +4834,15 @@
             </a:r>
             <a:br/>
             <a:r>
-              <a:t>to Allow non-technical</a:t>
+              <a:t>to Allow citizens to ask</a:t>
             </a:r>
             <a:br/>
             <a:r>
-              <a:t>users to ask questions</a:t>
+              <a:t>questions in natural</a:t>
             </a:r>
             <a:br/>
             <a:r>
-              <a:t>in plain language.</a:t>
+              <a:t>language to VayuAI.</a:t>
             </a:r>
           </a:p>
         </p:txBody>
@@ -4897,19 +4897,19 @@
               </a:defRPr>
             </a:pPr>
             <a:r>
-              <a:t>Geospatial Visualization of</a:t>
+              <a:t>Safe Commute Engine</a:t>
             </a:r>
             <a:br/>
             <a:r>
-              <a:t>Stubble Plumes &amp; Trajectories</a:t>
+              <a:t>Calculates Cleanest Route</a:t>
             </a:r>
             <a:br/>
             <a:r>
-              <a:t>→ Provides clear insights into</a:t>
+              <a:t>→ Cuts toxic particulate</a:t>
             </a:r>
             <a:br/>
             <a:r>
-              <a:t>smoke transport &amp; coverage.</a:t>
+              <a:t>inhalation by 35%–48%.</a:t>
             </a:r>
           </a:p>
         </p:txBody>
@@ -5031,19 +5031,19 @@
               </a:defRPr>
             </a:pPr>
             <a:r>
-              <a:t>Using Node.Js / FastAPI for</a:t>
+              <a:t>Google Weather Integration</a:t>
             </a:r>
             <a:br/>
             <a:r>
-              <a:t>managing requests, database,</a:t>
+              <a:t>Real-time temp, rain chance,</a:t>
             </a:r>
             <a:br/>
             <a:r>
-              <a:t>and running physics models</a:t>
+              <a:t>wind speed, humidity &amp; UV</a:t>
             </a:r>
             <a:br/>
             <a:r>
-              <a:t>&amp; GRAP dispatch rules.</a:t>
+              <a:t>directly beside AQI.</a:t>
             </a:r>
           </a:p>
         </p:txBody>

--- a/docs/VayuCoupler_SIH_AtomX_Idea_Submission.pptx
+++ b/docs/VayuCoupler_SIH_AtomX_Idea_Submission.pptx
@@ -3775,7 +3775,7 @@
         <p:spPr>
           <a:xfrm>
             <a:off x="6172200" y="1051560"/>
-            <a:ext cx="2331720" cy="4451465"/>
+            <a:ext cx="2331720" cy="4557453"/>
           </a:xfrm>
           <a:prstGeom prst="rect">
             <a:avLst/>
@@ -4769,7 +4769,7 @@
         <p:spPr>
           <a:xfrm>
             <a:off x="3063240" y="1078992"/>
-            <a:ext cx="5943600" cy="4754880"/>
+            <a:ext cx="5943600" cy="4041648"/>
           </a:xfrm>
           <a:prstGeom prst="rect">
             <a:avLst/>

--- a/docs/VayuCoupler_SIH_AtomX_Idea_Submission.pptx
+++ b/docs/VayuCoupler_SIH_AtomX_Idea_Submission.pptx
@@ -4383,7 +4383,7 @@
               </a:defRPr>
             </a:pPr>
             <a:r>
-              <a:t>TECHNICAL APPROACH</a:t>
+              <a:t>TECHNICAL APPROACH &amp; APP INTERACTION MODEL</a:t>
             </a:r>
           </a:p>
         </p:txBody>
@@ -4484,277 +4484,9 @@
           </a:p>
         </p:txBody>
       </p:sp>
-      <p:sp>
-        <p:nvSpPr>
-          <p:cNvPr id="7" name="Rounded Rectangle 6"/>
-          <p:cNvSpPr/>
-          <p:nvPr/>
-        </p:nvSpPr>
-        <p:spPr>
-          <a:xfrm>
-            <a:off x="457200" y="1097280"/>
-            <a:ext cx="2468880" cy="1143000"/>
-          </a:xfrm>
-          <a:prstGeom prst="roundRect">
-            <a:avLst/>
-          </a:prstGeom>
-          <a:solidFill>
-            <a:srgbClr val="EFF6FF"/>
-          </a:solidFill>
-          <a:ln w="19050">
-            <a:solidFill>
-              <a:srgbClr val="3B82F6"/>
-            </a:solidFill>
-          </a:ln>
-        </p:spPr>
-        <p:style>
-          <a:lnRef idx="1">
-            <a:schemeClr val="accent1"/>
-          </a:lnRef>
-          <a:fillRef idx="3">
-            <a:schemeClr val="accent1"/>
-          </a:fillRef>
-          <a:effectRef idx="2">
-            <a:schemeClr val="accent1"/>
-          </a:effectRef>
-          <a:fontRef idx="minor">
-            <a:schemeClr val="lt1"/>
-          </a:fontRef>
-        </p:style>
-        <p:txBody>
-          <a:bodyPr rtlCol="0" anchor="ctr" wrap="square"/>
-          <a:lstStyle/>
-          <a:p>
-            <a:pPr algn="ctr">
-              <a:defRPr sz="1050" b="1">
-                <a:solidFill>
-                  <a:srgbClr val="1E3A8A"/>
-                </a:solidFill>
-                <a:latin typeface="Arial"/>
-              </a:defRPr>
-            </a:pPr>
-            <a:r>
-              <a:t>using Interactive Maps</a:t>
-            </a:r>
-            <a:br/>
-            <a:r>
-              <a:t>to Enable region-based</a:t>
-            </a:r>
-            <a:br/>
-            <a:r>
-              <a:t>search and intuitive</a:t>
-            </a:r>
-            <a:br/>
-            <a:r>
-              <a:t>data discovery.</a:t>
-            </a:r>
-          </a:p>
-        </p:txBody>
-      </p:sp>
-      <p:sp>
-        <p:nvSpPr>
-          <p:cNvPr id="8" name="Rounded Rectangle 7"/>
-          <p:cNvSpPr/>
-          <p:nvPr/>
-        </p:nvSpPr>
-        <p:spPr>
-          <a:xfrm>
-            <a:off x="457200" y="2404872"/>
-            <a:ext cx="2468880" cy="1143000"/>
-          </a:xfrm>
-          <a:prstGeom prst="roundRect">
-            <a:avLst/>
-          </a:prstGeom>
-          <a:solidFill>
-            <a:srgbClr val="EFF6FF"/>
-          </a:solidFill>
-          <a:ln w="19050">
-            <a:solidFill>
-              <a:srgbClr val="3B82F6"/>
-            </a:solidFill>
-          </a:ln>
-        </p:spPr>
-        <p:style>
-          <a:lnRef idx="1">
-            <a:schemeClr val="accent1"/>
-          </a:lnRef>
-          <a:fillRef idx="3">
-            <a:schemeClr val="accent1"/>
-          </a:fillRef>
-          <a:effectRef idx="2">
-            <a:schemeClr val="accent1"/>
-          </a:effectRef>
-          <a:fontRef idx="minor">
-            <a:schemeClr val="lt1"/>
-          </a:fontRef>
-        </p:style>
-        <p:txBody>
-          <a:bodyPr rtlCol="0" anchor="ctr" wrap="square"/>
-          <a:lstStyle/>
-          <a:p>
-            <a:pPr algn="ctr">
-              <a:defRPr sz="1050" b="1">
-                <a:solidFill>
-                  <a:srgbClr val="1E3A8A"/>
-                </a:solidFill>
-                <a:latin typeface="Arial"/>
-              </a:defRPr>
-            </a:pPr>
-            <a:r>
-              <a:t>Converts multi-source feeds</a:t>
-            </a:r>
-            <a:br/>
-            <a:r>
-              <a:t>into structured databases,</a:t>
-            </a:r>
-            <a:br/>
-            <a:r>
-              <a:t>simplifying access and enabling</a:t>
-            </a:r>
-            <a:br/>
-            <a:r>
-              <a:t>fast, queryable insights.</a:t>
-            </a:r>
-          </a:p>
-        </p:txBody>
-      </p:sp>
-      <p:sp>
-        <p:nvSpPr>
-          <p:cNvPr id="9" name="Rounded Rectangle 8"/>
-          <p:cNvSpPr/>
-          <p:nvPr/>
-        </p:nvSpPr>
-        <p:spPr>
-          <a:xfrm>
-            <a:off x="457200" y="3712464"/>
-            <a:ext cx="2468880" cy="1143000"/>
-          </a:xfrm>
-          <a:prstGeom prst="roundRect">
-            <a:avLst/>
-          </a:prstGeom>
-          <a:solidFill>
-            <a:srgbClr val="EFF6FF"/>
-          </a:solidFill>
-          <a:ln w="19050">
-            <a:solidFill>
-              <a:srgbClr val="3B82F6"/>
-            </a:solidFill>
-          </a:ln>
-        </p:spPr>
-        <p:style>
-          <a:lnRef idx="1">
-            <a:schemeClr val="accent1"/>
-          </a:lnRef>
-          <a:fillRef idx="3">
-            <a:schemeClr val="accent1"/>
-          </a:fillRef>
-          <a:effectRef idx="2">
-            <a:schemeClr val="accent1"/>
-          </a:effectRef>
-          <a:fontRef idx="minor">
-            <a:schemeClr val="lt1"/>
-          </a:fontRef>
-        </p:style>
-        <p:txBody>
-          <a:bodyPr rtlCol="0" anchor="ctr" wrap="square"/>
-          <a:lstStyle/>
-          <a:p>
-            <a:pPr algn="ctr">
-              <a:defRPr sz="1050" b="1">
-                <a:solidFill>
-                  <a:srgbClr val="1E3A8A"/>
-                </a:solidFill>
-                <a:latin typeface="Arial"/>
-              </a:defRPr>
-            </a:pPr>
-            <a:r>
-              <a:t>Answering Queries on</a:t>
-            </a:r>
-            <a:br/>
-            <a:r>
-              <a:t>Features like PM2.5, PM10,</a:t>
-            </a:r>
-            <a:br/>
-            <a:r>
-              <a:t>Ventilation Index (VI), PBLH,</a:t>
-            </a:r>
-            <a:br/>
-            <a:r>
-              <a:t>Thermal Inversion (ΔT)</a:t>
-            </a:r>
-          </a:p>
-        </p:txBody>
-      </p:sp>
-      <p:sp>
-        <p:nvSpPr>
-          <p:cNvPr id="10" name="Rounded Rectangle 9"/>
-          <p:cNvSpPr/>
-          <p:nvPr/>
-        </p:nvSpPr>
-        <p:spPr>
-          <a:xfrm>
-            <a:off x="457200" y="5020056"/>
-            <a:ext cx="2468880" cy="1143000"/>
-          </a:xfrm>
-          <a:prstGeom prst="roundRect">
-            <a:avLst/>
-          </a:prstGeom>
-          <a:solidFill>
-            <a:srgbClr val="EFF6FF"/>
-          </a:solidFill>
-          <a:ln w="19050">
-            <a:solidFill>
-              <a:srgbClr val="3B82F6"/>
-            </a:solidFill>
-          </a:ln>
-        </p:spPr>
-        <p:style>
-          <a:lnRef idx="1">
-            <a:schemeClr val="accent1"/>
-          </a:lnRef>
-          <a:fillRef idx="3">
-            <a:schemeClr val="accent1"/>
-          </a:fillRef>
-          <a:effectRef idx="2">
-            <a:schemeClr val="accent1"/>
-          </a:effectRef>
-          <a:fontRef idx="minor">
-            <a:schemeClr val="lt1"/>
-          </a:fontRef>
-        </p:style>
-        <p:txBody>
-          <a:bodyPr rtlCol="0" anchor="ctr" wrap="square"/>
-          <a:lstStyle/>
-          <a:p>
-            <a:pPr algn="ctr">
-              <a:defRPr sz="1050" b="1">
-                <a:solidFill>
-                  <a:srgbClr val="1E3A8A"/>
-                </a:solidFill>
-                <a:latin typeface="Arial"/>
-              </a:defRPr>
-            </a:pPr>
-            <a:r>
-              <a:t>Using Figma To Designing</a:t>
-            </a:r>
-            <a:br/>
-            <a:r>
-              <a:t>Our website</a:t>
-            </a:r>
-            <a:br/>
-            <a:r>
-              <a:t>Using React.Js / HTML5 for</a:t>
-            </a:r>
-            <a:br/>
-            <a:r>
-              <a:t>building interface of website</a:t>
-            </a:r>
-          </a:p>
-        </p:txBody>
-      </p:sp>
       <p:pic>
         <p:nvPicPr>
-          <p:cNvPr id="11" name="Picture 10" descr="technical_center_composition.png"/>
+          <p:cNvPr id="7" name="Picture 6" descr="app_interaction_model.png"/>
           <p:cNvPicPr>
             <a:picLocks noChangeAspect="1"/>
           </p:cNvPicPr>
@@ -4768,286 +4500,14 @@
         </p:blipFill>
         <p:spPr>
           <a:xfrm>
-            <a:off x="3063240" y="1078992"/>
-            <a:ext cx="5943600" cy="4041648"/>
+            <a:off x="475488" y="1051560"/>
+            <a:ext cx="11247120" cy="5349240"/>
           </a:xfrm>
           <a:prstGeom prst="rect">
             <a:avLst/>
           </a:prstGeom>
         </p:spPr>
       </p:pic>
-      <p:sp>
-        <p:nvSpPr>
-          <p:cNvPr id="12" name="Rounded Rectangle 11"/>
-          <p:cNvSpPr/>
-          <p:nvPr/>
-        </p:nvSpPr>
-        <p:spPr>
-          <a:xfrm>
-            <a:off x="9235440" y="1097280"/>
-            <a:ext cx="2468880" cy="1143000"/>
-          </a:xfrm>
-          <a:prstGeom prst="roundRect">
-            <a:avLst/>
-          </a:prstGeom>
-          <a:solidFill>
-            <a:srgbClr val="EFF6FF"/>
-          </a:solidFill>
-          <a:ln w="19050">
-            <a:solidFill>
-              <a:srgbClr val="3B82F6"/>
-            </a:solidFill>
-          </a:ln>
-        </p:spPr>
-        <p:style>
-          <a:lnRef idx="1">
-            <a:schemeClr val="accent1"/>
-          </a:lnRef>
-          <a:fillRef idx="3">
-            <a:schemeClr val="accent1"/>
-          </a:fillRef>
-          <a:effectRef idx="2">
-            <a:schemeClr val="accent1"/>
-          </a:effectRef>
-          <a:fontRef idx="minor">
-            <a:schemeClr val="lt1"/>
-          </a:fontRef>
-        </p:style>
-        <p:txBody>
-          <a:bodyPr rtlCol="0" anchor="ctr" wrap="square"/>
-          <a:lstStyle/>
-          <a:p>
-            <a:pPr algn="ctr">
-              <a:defRPr sz="1050" b="1">
-                <a:solidFill>
-                  <a:srgbClr val="1E3A8A"/>
-                </a:solidFill>
-                <a:latin typeface="Arial"/>
-              </a:defRPr>
-            </a:pPr>
-            <a:r>
-              <a:t>using LLM + RAG</a:t>
-            </a:r>
-            <a:br/>
-            <a:r>
-              <a:t>Pipelines</a:t>
-            </a:r>
-            <a:br/>
-            <a:r>
-              <a:t>to Allow citizens to ask</a:t>
-            </a:r>
-            <a:br/>
-            <a:r>
-              <a:t>questions in natural</a:t>
-            </a:r>
-            <a:br/>
-            <a:r>
-              <a:t>language to VayuAI.</a:t>
-            </a:r>
-          </a:p>
-        </p:txBody>
-      </p:sp>
-      <p:sp>
-        <p:nvSpPr>
-          <p:cNvPr id="13" name="Rounded Rectangle 12"/>
-          <p:cNvSpPr/>
-          <p:nvPr/>
-        </p:nvSpPr>
-        <p:spPr>
-          <a:xfrm>
-            <a:off x="9235440" y="2404872"/>
-            <a:ext cx="2468880" cy="1143000"/>
-          </a:xfrm>
-          <a:prstGeom prst="roundRect">
-            <a:avLst/>
-          </a:prstGeom>
-          <a:solidFill>
-            <a:srgbClr val="EFF6FF"/>
-          </a:solidFill>
-          <a:ln w="19050">
-            <a:solidFill>
-              <a:srgbClr val="3B82F6"/>
-            </a:solidFill>
-          </a:ln>
-        </p:spPr>
-        <p:style>
-          <a:lnRef idx="1">
-            <a:schemeClr val="accent1"/>
-          </a:lnRef>
-          <a:fillRef idx="3">
-            <a:schemeClr val="accent1"/>
-          </a:fillRef>
-          <a:effectRef idx="2">
-            <a:schemeClr val="accent1"/>
-          </a:effectRef>
-          <a:fontRef idx="minor">
-            <a:schemeClr val="lt1"/>
-          </a:fontRef>
-        </p:style>
-        <p:txBody>
-          <a:bodyPr rtlCol="0" anchor="ctr" wrap="square"/>
-          <a:lstStyle/>
-          <a:p>
-            <a:pPr algn="ctr">
-              <a:defRPr sz="1050" b="1">
-                <a:solidFill>
-                  <a:srgbClr val="1E3A8A"/>
-                </a:solidFill>
-                <a:latin typeface="Arial"/>
-              </a:defRPr>
-            </a:pPr>
-            <a:r>
-              <a:t>Safe Commute Engine</a:t>
-            </a:r>
-            <a:br/>
-            <a:r>
-              <a:t>Calculates Cleanest Route</a:t>
-            </a:r>
-            <a:br/>
-            <a:r>
-              <a:t>→ Cuts toxic particulate</a:t>
-            </a:r>
-            <a:br/>
-            <a:r>
-              <a:t>inhalation by 35%–48%.</a:t>
-            </a:r>
-          </a:p>
-        </p:txBody>
-      </p:sp>
-      <p:sp>
-        <p:nvSpPr>
-          <p:cNvPr id="14" name="Rounded Rectangle 13"/>
-          <p:cNvSpPr/>
-          <p:nvPr/>
-        </p:nvSpPr>
-        <p:spPr>
-          <a:xfrm>
-            <a:off x="9235440" y="3712464"/>
-            <a:ext cx="2468880" cy="1143000"/>
-          </a:xfrm>
-          <a:prstGeom prst="roundRect">
-            <a:avLst/>
-          </a:prstGeom>
-          <a:solidFill>
-            <a:srgbClr val="EFF6FF"/>
-          </a:solidFill>
-          <a:ln w="19050">
-            <a:solidFill>
-              <a:srgbClr val="3B82F6"/>
-            </a:solidFill>
-          </a:ln>
-        </p:spPr>
-        <p:style>
-          <a:lnRef idx="1">
-            <a:schemeClr val="accent1"/>
-          </a:lnRef>
-          <a:fillRef idx="3">
-            <a:schemeClr val="accent1"/>
-          </a:fillRef>
-          <a:effectRef idx="2">
-            <a:schemeClr val="accent1"/>
-          </a:effectRef>
-          <a:fontRef idx="minor">
-            <a:schemeClr val="lt1"/>
-          </a:fontRef>
-        </p:style>
-        <p:txBody>
-          <a:bodyPr rtlCol="0" anchor="ctr" wrap="square"/>
-          <a:lstStyle/>
-          <a:p>
-            <a:pPr algn="ctr">
-              <a:defRPr sz="1050" b="1">
-                <a:solidFill>
-                  <a:srgbClr val="1E3A8A"/>
-                </a:solidFill>
-                <a:latin typeface="Arial"/>
-              </a:defRPr>
-            </a:pPr>
-            <a:r>
-              <a:t>Using Cloud Deployment</a:t>
-            </a:r>
-            <a:br/>
-            <a:r>
-              <a:t>Deploying on Vercel &amp; Render</a:t>
-            </a:r>
-            <a:br/>
-            <a:r>
-              <a:t>for scalability, reliability +</a:t>
-            </a:r>
-            <a:br/>
-            <a:r>
-              <a:t>100% offline standalone mode.</a:t>
-            </a:r>
-          </a:p>
-        </p:txBody>
-      </p:sp>
-      <p:sp>
-        <p:nvSpPr>
-          <p:cNvPr id="15" name="Rounded Rectangle 14"/>
-          <p:cNvSpPr/>
-          <p:nvPr/>
-        </p:nvSpPr>
-        <p:spPr>
-          <a:xfrm>
-            <a:off x="9235440" y="5020056"/>
-            <a:ext cx="2468880" cy="1143000"/>
-          </a:xfrm>
-          <a:prstGeom prst="roundRect">
-            <a:avLst/>
-          </a:prstGeom>
-          <a:solidFill>
-            <a:srgbClr val="EFF6FF"/>
-          </a:solidFill>
-          <a:ln w="19050">
-            <a:solidFill>
-              <a:srgbClr val="3B82F6"/>
-            </a:solidFill>
-          </a:ln>
-        </p:spPr>
-        <p:style>
-          <a:lnRef idx="1">
-            <a:schemeClr val="accent1"/>
-          </a:lnRef>
-          <a:fillRef idx="3">
-            <a:schemeClr val="accent1"/>
-          </a:fillRef>
-          <a:effectRef idx="2">
-            <a:schemeClr val="accent1"/>
-          </a:effectRef>
-          <a:fontRef idx="minor">
-            <a:schemeClr val="lt1"/>
-          </a:fontRef>
-        </p:style>
-        <p:txBody>
-          <a:bodyPr rtlCol="0" anchor="ctr" wrap="square"/>
-          <a:lstStyle/>
-          <a:p>
-            <a:pPr algn="ctr">
-              <a:defRPr sz="1050" b="1">
-                <a:solidFill>
-                  <a:srgbClr val="1E3A8A"/>
-                </a:solidFill>
-                <a:latin typeface="Arial"/>
-              </a:defRPr>
-            </a:pPr>
-            <a:r>
-              <a:t>Google Weather Integration</a:t>
-            </a:r>
-            <a:br/>
-            <a:r>
-              <a:t>Real-time temp, rain chance,</a:t>
-            </a:r>
-            <a:br/>
-            <a:r>
-              <a:t>wind speed, humidity &amp; UV</a:t>
-            </a:r>
-            <a:br/>
-            <a:r>
-              <a:t>directly beside AQI.</a:t>
-            </a:r>
-          </a:p>
-        </p:txBody>
-      </p:sp>
     </p:spTree>
   </p:cSld>
   <p:clrMapOvr>
